--- a/brand/beyna-agency/social/editable-pptx/Beyna-Instagram-Stories-1080x1920-EDITABLE.pptx
+++ b/brand/beyna-agency/social/editable-pptx/Beyna-Instagram-Stories-1080x1920-EDITABLE.pptx
@@ -4303,7 +4303,7 @@
             <a:r>
               <a:rPr b="1" sz="11250" spc="-337">
                 <a:solidFill>
-                  <a:srgbClr val="24242B"/>
+                  <a:srgbClr val="1B1046"/>
                 </a:solidFill>
                 <a:latin typeface="Syne"/>
               </a:rPr>
@@ -4340,7 +4340,7 @@
             <a:r>
               <a:rPr b="0" sz="3000">
                 <a:solidFill>
-                  <a:srgbClr val="24242B"/>
+                  <a:srgbClr val="1B1046"/>
                 </a:solidFill>
                 <a:latin typeface="Manrope Medium"/>
               </a:rPr>
@@ -4356,7 +4356,7 @@
             <a:r>
               <a:rPr b="0" sz="3000">
                 <a:solidFill>
-                  <a:srgbClr val="24242B"/>
+                  <a:srgbClr val="1B1046"/>
                 </a:solidFill>
                 <a:latin typeface="Manrope Medium"/>
               </a:rPr>
@@ -4382,11 +4382,11 @@
             </a:avLst>
           </a:prstGeom>
           <a:solidFill>
-            <a:srgbClr val="24242B"/>
+            <a:srgbClr val="1B1046"/>
           </a:solidFill>
           <a:ln w="28575">
             <a:solidFill>
-              <a:srgbClr val="24242B"/>
+              <a:srgbClr val="1B1046"/>
             </a:solidFill>
           </a:ln>
           <a:effectLst/>
@@ -4670,7 +4670,7 @@
             <a:r>
               <a:rPr b="1" sz="6900" spc="-172">
                 <a:solidFill>
-                  <a:srgbClr val="24242B"/>
+                  <a:srgbClr val="1B1046"/>
                 </a:solidFill>
                 <a:latin typeface="Syne"/>
               </a:rPr>
@@ -4707,7 +4707,7 @@
             <a:r>
               <a:rPr b="1" sz="3000">
                 <a:solidFill>
-                  <a:srgbClr val="24242B"/>
+                  <a:srgbClr val="1B1046"/>
                 </a:solidFill>
                 <a:latin typeface="Manrope"/>
               </a:rPr>
